--- a/Claude outputs/SOC_Passive_Balancing_MC.pptx
+++ b/Claude outputs/SOC_Passive_Balancing_MC.pptx
@@ -4374,7 +4374,7 @@
       </p:pic>
       <p:sp>
         <p:nvSpPr>
-          <p:cNvPr id="4" name="Caption Fig 6"/>
+          <p:cNvPr id="4" name="Caption Fig 8"/>
           <p:cNvSpPr txBox="1"/>
           <p:nvPr/>
         </p:nvSpPr>
@@ -4402,7 +4402,7 @@
                   <a:schemeClr val="tx2"/>
                 </a:solidFill>
               </a:rPr>
-              <a:t>Fig. 6. </a:t>
+              <a:t>Fig. 8. </a:t>
             </a:r>
             <a:pPr algn="ctr" indent="0" marL="0">
               <a:buNone/>
@@ -6104,7 +6104,7 @@
       </p:pic>
       <p:sp>
         <p:nvSpPr>
-          <p:cNvPr id="4" name="Caption Fig 7"/>
+          <p:cNvPr id="4" name="Caption Fig 9"/>
           <p:cNvSpPr txBox="1"/>
           <p:nvPr/>
         </p:nvSpPr>
@@ -6132,7 +6132,7 @@
                   <a:schemeClr val="tx2"/>
                 </a:solidFill>
               </a:rPr>
-              <a:t>Fig. 7. </a:t>
+              <a:t>Fig. 9. </a:t>
             </a:r>
             <a:pPr algn="ctr" indent="0" marL="0">
               <a:buNone/>
@@ -7187,8 +7187,8 @@
         </p:nvSpPr>
         <p:spPr>
           <a:xfrm>
-            <a:off x="548640" y="4526280"/>
-            <a:ext cx="11064240" cy="1737360"/>
+            <a:off x="548640" y="3794760"/>
+            <a:ext cx="11064240" cy="640080"/>
           </a:xfrm>
           <a:prstGeom prst="rect">
             <a:avLst/>
@@ -7204,29 +7204,48 @@
               <a:buNone/>
             </a:pPr>
             <a:r>
-              <a:rPr lang="en-US" sz="1000" dirty="0">
-                <a:solidFill>
-                  <a:schemeClr val="tx2"/>
-                </a:solidFill>
-              </a:rPr>
-              <a:t>[1] Texas Instruments, "Cell balancing with BQ769x2 battery monitors," App. Note SLUAA81.  </a:t>
-            </a:r>
-            <a:endParaRPr lang="en-US" sz="1000" dirty="0"/>
-          </a:p>
-          <a:p>
+              <a:rPr lang="en-US" sz="1200" b="1" dirty="0">
+                <a:solidFill>
+                  <a:schemeClr val="tx1"/>
+                </a:solidFill>
+              </a:rPr>
+              <a:t>AI use disclosure. </a:t>
+            </a:r>
             <a:pPr indent="0" marL="0">
               <a:buNone/>
             </a:pPr>
             <a:r>
-              <a:rPr lang="en-US" sz="1000" dirty="0">
-                <a:solidFill>
-                  <a:schemeClr val="tx2"/>
-                </a:solidFill>
-              </a:rPr>
-              <a:t>[2] "Cell balancing paradigms: advanced types, algorithms, and optimization frameworks," arXiv:2411.05478, 2024.</a:t>
-            </a:r>
-            <a:endParaRPr lang="en-US" sz="1000" dirty="0"/>
-          </a:p>
+              <a:rPr lang="en-US" sz="1200" dirty="0">
+                <a:solidFill>
+                  <a:schemeClr val="tx1"/>
+                </a:solidFill>
+              </a:rPr>
+              <a:t>Claude (Anthropic) [6] assisted with MATLAB/Simulink scripting, the Monte Carlo script, literature lookup and drafting of this presentation. The authors ran and checked the simulations and take responsibility for all content.</a:t>
+            </a:r>
+            <a:endParaRPr lang="en-US" sz="1200" dirty="0"/>
+          </a:p>
+        </p:txBody>
+      </p:sp>
+      <p:sp>
+        <p:nvSpPr>
+          <p:cNvPr id="7" name="Text"/>
+          <p:cNvSpPr txBox="1"/>
+          <p:nvPr/>
+        </p:nvSpPr>
+        <p:spPr>
+          <a:xfrm>
+            <a:off x="548640" y="4572000"/>
+            <a:ext cx="11064240" cy="1737360"/>
+          </a:xfrm>
+          <a:prstGeom prst="rect">
+            <a:avLst/>
+          </a:prstGeom>
+          <a:noFill/>
+          <a:ln/>
+        </p:spPr>
+        <p:txBody>
+          <a:bodyPr wrap="square" lIns="0" tIns="0" rIns="0" bIns="0" rtlCol="0" anchor="t"/>
+          <a:lstStyle/>
           <a:p>
             <a:pPr indent="0" marL="0">
               <a:buNone/>
@@ -7237,7 +7256,7 @@
                   <a:schemeClr val="tx2"/>
                 </a:solidFill>
               </a:rPr>
-              <a:t>[3] "A deeper look into active balancing on BMS, Part 1," Embedded Computing Design.</a:t>
+              <a:t>[1] Texas Instruments, "Cell balancing with BQ769x2 battery monitors," App. Note SLUAA81.  </a:t>
             </a:r>
             <a:endParaRPr lang="en-US" sz="1000" dirty="0"/>
           </a:p>
@@ -7251,7 +7270,7 @@
                   <a:schemeClr val="tx2"/>
                 </a:solidFill>
               </a:rPr>
-              <a:t>[4] "SOC estimation for onboard LiFePO4 batteries with adaptive state update in specific OCV ranges," Applied Energy, 2023.</a:t>
+              <a:t>[2] "Cell balancing paradigms: advanced types, algorithms, and optimization frameworks," arXiv:2411.05478, 2024.</a:t>
             </a:r>
             <a:endParaRPr lang="en-US" sz="1000" dirty="0"/>
           </a:p>
@@ -7265,7 +7284,49 @@
                   <a:schemeClr val="tx2"/>
                 </a:solidFill>
               </a:rPr>
+              <a:t>[3] "A deeper look into active balancing on BMS, Part 1," Embedded Computing Design.</a:t>
+            </a:r>
+            <a:endParaRPr lang="en-US" sz="1000" dirty="0"/>
+          </a:p>
+          <a:p>
+            <a:pPr indent="0" marL="0">
+              <a:buNone/>
+            </a:pPr>
+            <a:r>
+              <a:rPr lang="en-US" sz="1000" dirty="0">
+                <a:solidFill>
+                  <a:schemeClr val="tx2"/>
+                </a:solidFill>
+              </a:rPr>
+              <a:t>[4] "SOC estimation for onboard LiFePO4 batteries with adaptive state update in specific OCV ranges," Applied Energy, 2023.</a:t>
+            </a:r>
+            <a:endParaRPr lang="en-US" sz="1000" dirty="0"/>
+          </a:p>
+          <a:p>
+            <a:pPr indent="0" marL="0">
+              <a:buNone/>
+            </a:pPr>
+            <a:r>
+              <a:rPr lang="en-US" sz="1000" dirty="0">
+                <a:solidFill>
+                  <a:schemeClr val="tx2"/>
+                </a:solidFill>
+              </a:rPr>
               <a:t>[5] The MathWorks, Inc., "Simscape Battery: Battery (Table-Based) and Passive Cell Balancing," MATLAB R2025b doc., 2025.</a:t>
+            </a:r>
+            <a:endParaRPr lang="en-US" sz="1000" dirty="0"/>
+          </a:p>
+          <a:p>
+            <a:pPr indent="0" marL="0">
+              <a:buNone/>
+            </a:pPr>
+            <a:r>
+              <a:rPr lang="en-US" sz="1000" dirty="0">
+                <a:solidFill>
+                  <a:schemeClr val="tx2"/>
+                </a:solidFill>
+              </a:rPr>
+              <a:t>[6] Anthropic, "Claude" [Large language model], 2026. [Online]. Available: https://claude.ai</a:t>
             </a:r>
             <a:endParaRPr lang="en-US" sz="1000" dirty="0"/>
           </a:p>
@@ -12084,17 +12145,64 @@
         </p:blipFill>
         <p:spPr>
           <a:xfrm>
-            <a:off x="1056403" y="5074920"/>
-            <a:ext cx="2001994" cy="1188720"/>
+            <a:off x="1287402" y="4846320"/>
+            <a:ext cx="1539995" cy="914400"/>
           </a:xfrm>
           <a:prstGeom prst="rect">
             <a:avLst/>
           </a:prstGeom>
         </p:spPr>
       </p:pic>
+      <p:sp>
+        <p:nvSpPr>
+          <p:cNvPr id="7" name="Caption Fig 4"/>
+          <p:cNvSpPr txBox="1"/>
+          <p:nvPr/>
+        </p:nvSpPr>
+        <p:spPr>
+          <a:xfrm>
+            <a:off x="548640" y="5806440"/>
+            <a:ext cx="3017520" cy="320040"/>
+          </a:xfrm>
+          <a:prstGeom prst="rect">
+            <a:avLst/>
+          </a:prstGeom>
+          <a:noFill/>
+          <a:ln/>
+        </p:spPr>
+        <p:txBody>
+          <a:bodyPr wrap="square" lIns="0" tIns="0" rIns="0" bIns="0" rtlCol="0" anchor="ctr"/>
+          <a:lstStyle/>
+          <a:p>
+            <a:pPr algn="ctr" indent="0" marL="0">
+              <a:buNone/>
+            </a:pPr>
+            <a:r>
+              <a:rPr lang="en-US" sz="1100" b="1" dirty="0">
+                <a:solidFill>
+                  <a:schemeClr val="tx2"/>
+                </a:solidFill>
+              </a:rPr>
+              <a:t>Fig. 4. </a:t>
+            </a:r>
+            <a:pPr algn="ctr" indent="0" marL="0">
+              <a:buNone/>
+            </a:pPr>
+            <a:r>
+              <a:rPr lang="en-US" sz="1100" dirty="0">
+                <a:solidFill>
+                  <a:schemeClr val="tx2"/>
+                </a:solidFill>
+              </a:rPr>
+              <a:t>Inside Cell k (masked subsystem).</a:t>
+            </a:r>
+            <a:endParaRPr lang="en-US" sz="1100" dirty="0"/>
+          </a:p>
+        </p:txBody>
+      </p:sp>
       <p:pic>
         <p:nvPicPr>
-          <p:cNvPr id="7" name="BMS subsystem" descr="BMS subsystem">    </p:cNvPr>
+          <p:cNvPr id="8" name="BMS subsystem" descr="BMS subsystem">    </p:cNvPr>
           <p:cNvPicPr>
             <a:picLocks noChangeAspect="1"/>
           </p:cNvPicPr>
@@ -12108,14 +12216,61 @@
         </p:blipFill>
         <p:spPr>
           <a:xfrm>
-            <a:off x="4085886" y="5074920"/>
-            <a:ext cx="3715428" cy="1188720"/>
+            <a:off x="4514589" y="4846320"/>
+            <a:ext cx="2858022" cy="914400"/>
           </a:xfrm>
           <a:prstGeom prst="rect">
             <a:avLst/>
           </a:prstGeom>
         </p:spPr>
       </p:pic>
+      <p:sp>
+        <p:nvSpPr>
+          <p:cNvPr id="9" name="Caption Fig 5"/>
+          <p:cNvSpPr txBox="1"/>
+          <p:nvPr/>
+        </p:nvSpPr>
+        <p:spPr>
+          <a:xfrm>
+            <a:off x="3840480" y="5806440"/>
+            <a:ext cx="4206240" cy="320040"/>
+          </a:xfrm>
+          <a:prstGeom prst="rect">
+            <a:avLst/>
+          </a:prstGeom>
+          <a:noFill/>
+          <a:ln/>
+        </p:spPr>
+        <p:txBody>
+          <a:bodyPr wrap="square" lIns="0" tIns="0" rIns="0" bIns="0" rtlCol="0" anchor="ctr"/>
+          <a:lstStyle/>
+          <a:p>
+            <a:pPr algn="ctr" indent="0" marL="0">
+              <a:buNone/>
+            </a:pPr>
+            <a:r>
+              <a:rPr lang="en-US" sz="1100" b="1" dirty="0">
+                <a:solidFill>
+                  <a:schemeClr val="tx2"/>
+                </a:solidFill>
+              </a:rPr>
+              <a:t>Fig. 5. </a:t>
+            </a:r>
+            <a:pPr algn="ctr" indent="0" marL="0">
+              <a:buNone/>
+            </a:pPr>
+            <a:r>
+              <a:rPr lang="en-US" sz="1100" dirty="0">
+                <a:solidFill>
+                  <a:schemeClr val="tx2"/>
+                </a:solidFill>
+              </a:rPr>
+              <a:t>Inside BMS: supervisor and balancing logic.</a:t>
+            </a:r>
+            <a:endParaRPr lang="en-US" sz="1100" dirty="0"/>
+          </a:p>
+        </p:txBody>
+      </p:sp>
       <p:sp>
         <p:nvSpPr>
           <p:cNvPr id="25" name="Slide Number Placeholder 0"/>
@@ -13199,7 +13354,7 @@
       </p:pic>
       <p:sp>
         <p:nvSpPr>
-          <p:cNvPr id="4" name="Caption Fig 4"/>
+          <p:cNvPr id="4" name="Caption Fig 6"/>
           <p:cNvSpPr txBox="1"/>
           <p:nvPr/>
         </p:nvSpPr>
@@ -13227,7 +13382,7 @@
                   <a:schemeClr val="tx2"/>
                 </a:solidFill>
               </a:rPr>
-              <a:t>Fig. 4. </a:t>
+              <a:t>Fig. 6. </a:t>
             </a:r>
             <a:pPr algn="ctr" indent="0" marL="0">
               <a:buNone/>
@@ -13532,7 +13687,7 @@
       </p:pic>
       <p:sp>
         <p:nvSpPr>
-          <p:cNvPr id="4" name="Caption Fig 5"/>
+          <p:cNvPr id="4" name="Caption Fig 7"/>
           <p:cNvSpPr txBox="1"/>
           <p:nvPr/>
         </p:nvSpPr>
@@ -13560,7 +13715,7 @@
                   <a:schemeClr val="tx2"/>
                 </a:solidFill>
               </a:rPr>
-              <a:t>Fig. 5. </a:t>
+              <a:t>Fig. 7. </a:t>
             </a:r>
             <a:pPr algn="ctr" indent="0" marL="0">
               <a:buNone/>
